--- a/sujet/Parcell-IA-Presentation.pptx
+++ b/sujet/Parcell-IA-Presentation.pptx
@@ -2428,7 +2428,7 @@
                   <a:srgbClr val="4CAF78"/>
                 </a:solidFill>
               </a:rPr>
-              <a:t>46</a:t>
+              <a:t>84</a:t>
             </a:r>
             <a:endParaRPr lang="en-US" sz="4000" dirty="0"/>
           </a:p>
@@ -4360,7 +4360,7 @@
                   <a:srgbClr val="374151"/>
                 </a:solidFill>
               </a:rPr>
-              <a:t>Inscription / connexion JWT — accès protégé à toutes les routes API</a:t>
+              <a:t>Connexion JWT — accès protégé à toutes les routes API (login, MVP)</a:t>
             </a:r>
             <a:endParaRPr lang="en-US" sz="1100" dirty="0"/>
           </a:p>
@@ -4985,7 +4985,7 @@
                   <a:srgbClr val="374151"/>
                 </a:solidFill>
               </a:rPr>
-              <a:t>SGBD relationnel robuste, support des géométries (PostGIS), compatible Azure.</a:t>
+              <a:t>SGBD relationnel robuste, géométries stockées en JSONB, migrations Sequelize, compatible Azure.</a:t>
             </a:r>
             <a:endParaRPr lang="en-US" sz="1200" dirty="0"/>
           </a:p>
@@ -5164,7 +5164,7 @@
                   <a:srgbClr val="374151"/>
                 </a:solidFill>
               </a:rPr>
-              <a:t>Containerisation reproductible, scalabilité automatique, CI/CD via GitHub Actions.</a:t>
+              <a:t>Containerisation reproductible, déploiement Azure Container Apps, script deploy-azure.sh.</a:t>
             </a:r>
             <a:endParaRPr lang="en-US" sz="1200" dirty="0"/>
           </a:p>
@@ -6325,7 +6325,7 @@
                   <a:srgbClr val="A7D9B8"/>
                 </a:solidFill>
               </a:rPr>
-              <a:t>JWT auth sur toutes les routes  ·  Fallback IA : OpenAI direct → mock  ·  SSL activé sur Azure PostgreSQL  ·  46 commits — dépôt public GitHub</a:t>
+              <a:t>JWT auth sur toutes les routes  ·  Fallback IA : OpenAI direct → mock  ·  SSL activé sur Azure PostgreSQL  ·  84 commits — dépôt public GitHub</a:t>
             </a:r>
             <a:endParaRPr lang="en-US" sz="1000" dirty="0"/>
           </a:p>
@@ -8191,1443 +8191,8 @@
 </p:sld>
 </file>
 
-<file path=ppt/slides/slide7.xml><?xml version="1.0" encoding="utf-8"?>
-<p:sld xmlns:a="http://schemas.openxmlformats.org/drawingml/2006/main" xmlns:r="http://schemas.openxmlformats.org/officeDocument/2006/relationships" xmlns:p="http://schemas.openxmlformats.org/presentationml/2006/main">
-  <p:cSld name="Slide 7">
-    <p:bg>
-      <p:bgPr>
-        <a:solidFill>
-          <a:srgbClr val="F9FAFB"/>
-        </a:solidFill>
-      </p:bgPr>
-    </p:bg>
-    <p:spTree>
-      <p:nvGrpSpPr>
-        <p:cNvPr id="1" name=""/>
-        <p:cNvGrpSpPr/>
-        <p:nvPr/>
-      </p:nvGrpSpPr>
-      <p:grpSpPr>
-        <a:xfrm>
-          <a:off x="0" y="0"/>
-          <a:ext cx="0" cy="0"/>
-          <a:chOff x="0" y="0"/>
-          <a:chExt cx="0" cy="0"/>
-        </a:xfrm>
-      </p:grpSpPr>
-      <p:sp>
-        <p:nvSpPr>
-          <p:cNvPr id="2" name="Shape 0"/>
-          <p:cNvSpPr/>
-          <p:nvPr/>
-        </p:nvSpPr>
-        <p:spPr>
-          <a:xfrm>
-            <a:off x="0" y="0"/>
-            <a:ext cx="9144000" cy="685800"/>
-          </a:xfrm>
-          <a:prstGeom prst="rect">
-            <a:avLst/>
-          </a:prstGeom>
-          <a:solidFill>
-            <a:srgbClr val="1A4731"/>
-          </a:solidFill>
-          <a:ln/>
-        </p:spPr>
-      </p:sp>
-      <p:sp>
-        <p:nvSpPr>
-          <p:cNvPr id="3" name="Text 1"/>
-          <p:cNvSpPr/>
-          <p:nvPr/>
-        </p:nvSpPr>
-        <p:spPr>
-          <a:xfrm>
-            <a:off x="365760" y="0"/>
-            <a:ext cx="8229600" cy="685800"/>
-          </a:xfrm>
-          <a:prstGeom prst="rect">
-            <a:avLst/>
-          </a:prstGeom>
-          <a:noFill/>
-          <a:ln/>
-        </p:spPr>
-        <p:txBody>
-          <a:bodyPr wrap="square" lIns="0" tIns="0" rIns="0" bIns="0" rtlCol="0" anchor="ctr"/>
-          <a:lstStyle/>
-          <a:p>
-            <a:pPr indent="0" marL="0">
-              <a:buNone/>
-            </a:pPr>
-            <a:r>
-              <a:rPr lang="en-US" sz="2200" b="1" dirty="0">
-                <a:solidFill>
-                  <a:srgbClr val="FFFFFF"/>
-                </a:solidFill>
-              </a:rPr>
-              <a:t>Déploiement Cloud &amp; Infrastructure</a:t>
-            </a:r>
-            <a:endParaRPr lang="en-US" sz="2200" dirty="0"/>
-          </a:p>
-        </p:txBody>
-      </p:sp>
-      <p:sp>
-        <p:nvSpPr>
-          <p:cNvPr id="4" name="Shape 2"/>
-          <p:cNvSpPr/>
-          <p:nvPr/>
-        </p:nvSpPr>
-        <p:spPr>
-          <a:xfrm>
-            <a:off x="274320" y="822960"/>
-            <a:ext cx="5120640" cy="4069080"/>
-          </a:xfrm>
-          <a:prstGeom prst="rect">
-            <a:avLst/>
-          </a:prstGeom>
-          <a:solidFill>
-            <a:srgbClr val="FFFFFF"/>
-          </a:solidFill>
-          <a:ln/>
-          <a:effectLst>
-            <a:outerShdw sx="100000" sy="100000" kx="0" ky="0" algn="bl" rotWithShape="0" blurRad="101600" dist="38100" dir="8100000">
-              <a:srgbClr val="000000">
-                <a:alpha val="12000"/>
-              </a:srgbClr>
-            </a:outerShdw>
-          </a:effectLst>
-        </p:spPr>
-      </p:sp>
-      <p:sp>
-        <p:nvSpPr>
-          <p:cNvPr id="5" name="Shape 3"/>
-          <p:cNvSpPr/>
-          <p:nvPr/>
-        </p:nvSpPr>
-        <p:spPr>
-          <a:xfrm>
-            <a:off x="274320" y="822960"/>
-            <a:ext cx="5120640" cy="502920"/>
-          </a:xfrm>
-          <a:prstGeom prst="rect">
-            <a:avLst/>
-          </a:prstGeom>
-          <a:solidFill>
-            <a:srgbClr val="0277BD"/>
-          </a:solidFill>
-          <a:ln/>
-        </p:spPr>
-      </p:sp>
-      <p:pic>
-        <p:nvPicPr>
-          <p:cNvPr id="6" name="Image 0" descr="preencoded.png">    </p:cNvPr>
-          <p:cNvPicPr>
-            <a:picLocks noChangeAspect="1"/>
-          </p:cNvPicPr>
-          <p:nvPr/>
-        </p:nvPicPr>
-        <p:blipFill>
-          <a:blip r:embed="rId1"/>
-          <a:stretch>
-            <a:fillRect/>
-          </a:stretch>
-        </p:blipFill>
-        <p:spPr>
-          <a:xfrm>
-            <a:off x="365760" y="886968"/>
-            <a:ext cx="347472" cy="347472"/>
-          </a:xfrm>
-          <a:prstGeom prst="rect">
-            <a:avLst/>
-          </a:prstGeom>
-        </p:spPr>
-      </p:pic>
-      <p:sp>
-        <p:nvSpPr>
-          <p:cNvPr id="7" name="Text 4"/>
-          <p:cNvSpPr/>
-          <p:nvPr/>
-        </p:nvSpPr>
-        <p:spPr>
-          <a:xfrm>
-            <a:off x="777240" y="822960"/>
-            <a:ext cx="4572000" cy="502920"/>
-          </a:xfrm>
-          <a:prstGeom prst="rect">
-            <a:avLst/>
-          </a:prstGeom>
-          <a:noFill/>
-          <a:ln/>
-        </p:spPr>
-        <p:txBody>
-          <a:bodyPr wrap="square" lIns="0" tIns="0" rIns="0" bIns="0" rtlCol="0" anchor="ctr"/>
-          <a:lstStyle/>
-          <a:p>
-            <a:pPr indent="0" marL="0">
-              <a:buNone/>
-            </a:pPr>
-            <a:r>
-              <a:rPr lang="en-US" sz="1300" b="1" dirty="0">
-                <a:solidFill>
-                  <a:srgbClr val="FFFFFF"/>
-                </a:solidFill>
-              </a:rPr>
-              <a:t>Docker Compose — Profils de déploiement</a:t>
-            </a:r>
-            <a:endParaRPr lang="en-US" sz="1300" dirty="0"/>
-          </a:p>
-        </p:txBody>
-      </p:sp>
-      <p:sp>
-        <p:nvSpPr>
-          <p:cNvPr id="8" name="Shape 5"/>
-          <p:cNvSpPr/>
-          <p:nvPr/>
-        </p:nvSpPr>
-        <p:spPr>
-          <a:xfrm>
-            <a:off x="457200" y="1463040"/>
-            <a:ext cx="4754880" cy="548640"/>
-          </a:xfrm>
-          <a:prstGeom prst="rect">
-            <a:avLst/>
-          </a:prstGeom>
-          <a:solidFill>
-            <a:srgbClr val="F9FAFB"/>
-          </a:solidFill>
-          <a:ln/>
-        </p:spPr>
-      </p:sp>
-      <p:sp>
-        <p:nvSpPr>
-          <p:cNvPr id="9" name="Shape 6"/>
-          <p:cNvSpPr/>
-          <p:nvPr/>
-        </p:nvSpPr>
-        <p:spPr>
-          <a:xfrm>
-            <a:off x="457200" y="1463040"/>
-            <a:ext cx="64008" cy="548640"/>
-          </a:xfrm>
-          <a:prstGeom prst="rect">
-            <a:avLst/>
-          </a:prstGeom>
-          <a:solidFill>
-            <a:srgbClr val="1B5E20"/>
-          </a:solidFill>
-          <a:ln/>
-        </p:spPr>
-      </p:sp>
-      <p:sp>
-        <p:nvSpPr>
-          <p:cNvPr id="10" name="Text 7"/>
-          <p:cNvSpPr/>
-          <p:nvPr/>
-        </p:nvSpPr>
-        <p:spPr>
-          <a:xfrm>
-            <a:off x="594360" y="1481328"/>
-            <a:ext cx="3200400" cy="256032"/>
-          </a:xfrm>
-          <a:prstGeom prst="rect">
-            <a:avLst/>
-          </a:prstGeom>
-          <a:noFill/>
-          <a:ln/>
-        </p:spPr>
-        <p:txBody>
-          <a:bodyPr wrap="square" lIns="0" tIns="0" rIns="0" bIns="0" rtlCol="0" anchor="ctr"/>
-          <a:lstStyle/>
-          <a:p>
-            <a:pPr indent="0" marL="0">
-              <a:buNone/>
-            </a:pPr>
-            <a:r>
-              <a:rPr lang="en-US" sz="1100" b="1" dirty="0">
-                <a:solidFill>
-                  <a:srgbClr val="1B5E20"/>
-                </a:solidFill>
-                <a:latin typeface="Consolas" pitchFamily="34" charset="0"/>
-                <a:ea typeface="Consolas" pitchFamily="34" charset="-122"/>
-                <a:cs typeface="Consolas" pitchFamily="34" charset="-120"/>
-              </a:rPr>
-              <a:t>--profile local-db</a:t>
-            </a:r>
-            <a:endParaRPr lang="en-US" sz="1100" dirty="0"/>
-          </a:p>
-        </p:txBody>
-      </p:sp>
-      <p:sp>
-        <p:nvSpPr>
-          <p:cNvPr id="11" name="Text 8"/>
-          <p:cNvSpPr/>
-          <p:nvPr/>
-        </p:nvSpPr>
-        <p:spPr>
-          <a:xfrm>
-            <a:off x="594360" y="1737360"/>
-            <a:ext cx="4572000" cy="256032"/>
-          </a:xfrm>
-          <a:prstGeom prst="rect">
-            <a:avLst/>
-          </a:prstGeom>
-          <a:noFill/>
-          <a:ln/>
-        </p:spPr>
-        <p:txBody>
-          <a:bodyPr wrap="square" lIns="0" tIns="0" rIns="0" bIns="0" rtlCol="0" anchor="ctr"/>
-          <a:lstStyle/>
-          <a:p>
-            <a:pPr indent="0" marL="0">
-              <a:buNone/>
-            </a:pPr>
-            <a:r>
-              <a:rPr lang="en-US" sz="1100" dirty="0">
-                <a:solidFill>
-                  <a:srgbClr val="6B7280"/>
-                </a:solidFill>
-              </a:rPr>
-              <a:t>Backend + PostgreSQL local (dev)</a:t>
-            </a:r>
-            <a:endParaRPr lang="en-US" sz="1100" dirty="0"/>
-          </a:p>
-        </p:txBody>
-      </p:sp>
-      <p:sp>
-        <p:nvSpPr>
-          <p:cNvPr id="12" name="Shape 9"/>
-          <p:cNvSpPr/>
-          <p:nvPr/>
-        </p:nvSpPr>
-        <p:spPr>
-          <a:xfrm>
-            <a:off x="457200" y="2148840"/>
-            <a:ext cx="4754880" cy="548640"/>
-          </a:xfrm>
-          <a:prstGeom prst="rect">
-            <a:avLst/>
-          </a:prstGeom>
-          <a:solidFill>
-            <a:srgbClr val="F9FAFB"/>
-          </a:solidFill>
-          <a:ln/>
-        </p:spPr>
-      </p:sp>
-      <p:sp>
-        <p:nvSpPr>
-          <p:cNvPr id="13" name="Shape 10"/>
-          <p:cNvSpPr/>
-          <p:nvPr/>
-        </p:nvSpPr>
-        <p:spPr>
-          <a:xfrm>
-            <a:off x="457200" y="2148840"/>
-            <a:ext cx="64008" cy="548640"/>
-          </a:xfrm>
-          <a:prstGeom prst="rect">
-            <a:avLst/>
-          </a:prstGeom>
-          <a:solidFill>
-            <a:srgbClr val="0277BD"/>
-          </a:solidFill>
-          <a:ln/>
-        </p:spPr>
-      </p:sp>
-      <p:sp>
-        <p:nvSpPr>
-          <p:cNvPr id="14" name="Text 11"/>
-          <p:cNvSpPr/>
-          <p:nvPr/>
-        </p:nvSpPr>
-        <p:spPr>
-          <a:xfrm>
-            <a:off x="594360" y="2167128"/>
-            <a:ext cx="3200400" cy="256032"/>
-          </a:xfrm>
-          <a:prstGeom prst="rect">
-            <a:avLst/>
-          </a:prstGeom>
-          <a:noFill/>
-          <a:ln/>
-        </p:spPr>
-        <p:txBody>
-          <a:bodyPr wrap="square" lIns="0" tIns="0" rIns="0" bIns="0" rtlCol="0" anchor="ctr"/>
-          <a:lstStyle/>
-          <a:p>
-            <a:pPr indent="0" marL="0">
-              <a:buNone/>
-            </a:pPr>
-            <a:r>
-              <a:rPr lang="en-US" sz="1100" b="1" dirty="0">
-                <a:solidFill>
-                  <a:srgbClr val="0277BD"/>
-                </a:solidFill>
-                <a:latin typeface="Consolas" pitchFamily="34" charset="0"/>
-                <a:ea typeface="Consolas" pitchFamily="34" charset="-122"/>
-                <a:cs typeface="Consolas" pitchFamily="34" charset="-120"/>
-              </a:rPr>
-              <a:t>docker compose up</a:t>
-            </a:r>
-            <a:endParaRPr lang="en-US" sz="1100" dirty="0"/>
-          </a:p>
-        </p:txBody>
-      </p:sp>
-      <p:sp>
-        <p:nvSpPr>
-          <p:cNvPr id="15" name="Text 12"/>
-          <p:cNvSpPr/>
-          <p:nvPr/>
-        </p:nvSpPr>
-        <p:spPr>
-          <a:xfrm>
-            <a:off x="594360" y="2423160"/>
-            <a:ext cx="4572000" cy="256032"/>
-          </a:xfrm>
-          <a:prstGeom prst="rect">
-            <a:avLst/>
-          </a:prstGeom>
-          <a:noFill/>
-          <a:ln/>
-        </p:spPr>
-        <p:txBody>
-          <a:bodyPr wrap="square" lIns="0" tIns="0" rIns="0" bIns="0" rtlCol="0" anchor="ctr"/>
-          <a:lstStyle/>
-          <a:p>
-            <a:pPr indent="0" marL="0">
-              <a:buNone/>
-            </a:pPr>
-            <a:r>
-              <a:rPr lang="en-US" sz="1100" dirty="0">
-                <a:solidFill>
-                  <a:srgbClr val="6B7280"/>
-                </a:solidFill>
-              </a:rPr>
-              <a:t>Backend seul + Azure PostgreSQL via DATABASE_URL</a:t>
-            </a:r>
-            <a:endParaRPr lang="en-US" sz="1100" dirty="0"/>
-          </a:p>
-        </p:txBody>
-      </p:sp>
-      <p:sp>
-        <p:nvSpPr>
-          <p:cNvPr id="16" name="Shape 13"/>
-          <p:cNvSpPr/>
-          <p:nvPr/>
-        </p:nvSpPr>
-        <p:spPr>
-          <a:xfrm>
-            <a:off x="457200" y="2834640"/>
-            <a:ext cx="4754880" cy="548640"/>
-          </a:xfrm>
-          <a:prstGeom prst="rect">
-            <a:avLst/>
-          </a:prstGeom>
-          <a:solidFill>
-            <a:srgbClr val="F9FAFB"/>
-          </a:solidFill>
-          <a:ln/>
-        </p:spPr>
-      </p:sp>
-      <p:sp>
-        <p:nvSpPr>
-          <p:cNvPr id="17" name="Shape 14"/>
-          <p:cNvSpPr/>
-          <p:nvPr/>
-        </p:nvSpPr>
-        <p:spPr>
-          <a:xfrm>
-            <a:off x="457200" y="2834640"/>
-            <a:ext cx="64008" cy="548640"/>
-          </a:xfrm>
-          <a:prstGeom prst="rect">
-            <a:avLst/>
-          </a:prstGeom>
-          <a:solidFill>
-            <a:srgbClr val="E65100"/>
-          </a:solidFill>
-          <a:ln/>
-        </p:spPr>
-      </p:sp>
-      <p:sp>
-        <p:nvSpPr>
-          <p:cNvPr id="18" name="Text 15"/>
-          <p:cNvSpPr/>
-          <p:nvPr/>
-        </p:nvSpPr>
-        <p:spPr>
-          <a:xfrm>
-            <a:off x="594360" y="2852928"/>
-            <a:ext cx="3200400" cy="256032"/>
-          </a:xfrm>
-          <a:prstGeom prst="rect">
-            <a:avLst/>
-          </a:prstGeom>
-          <a:noFill/>
-          <a:ln/>
-        </p:spPr>
-        <p:txBody>
-          <a:bodyPr wrap="square" lIns="0" tIns="0" rIns="0" bIns="0" rtlCol="0" anchor="ctr"/>
-          <a:lstStyle/>
-          <a:p>
-            <a:pPr indent="0" marL="0">
-              <a:buNone/>
-            </a:pPr>
-            <a:r>
-              <a:rPr lang="en-US" sz="1100" b="1" dirty="0">
-                <a:solidFill>
-                  <a:srgbClr val="E65100"/>
-                </a:solidFill>
-                <a:latin typeface="Consolas" pitchFamily="34" charset="0"/>
-                <a:ea typeface="Consolas" pitchFamily="34" charset="-122"/>
-                <a:cs typeface="Consolas" pitchFamily="34" charset="-120"/>
-              </a:rPr>
-              <a:t>--profile mobile</a:t>
-            </a:r>
-            <a:endParaRPr lang="en-US" sz="1100" dirty="0"/>
-          </a:p>
-        </p:txBody>
-      </p:sp>
-      <p:sp>
-        <p:nvSpPr>
-          <p:cNvPr id="19" name="Text 16"/>
-          <p:cNvSpPr/>
-          <p:nvPr/>
-        </p:nvSpPr>
-        <p:spPr>
-          <a:xfrm>
-            <a:off x="594360" y="3108960"/>
-            <a:ext cx="4572000" cy="256032"/>
-          </a:xfrm>
-          <a:prstGeom prst="rect">
-            <a:avLst/>
-          </a:prstGeom>
-          <a:noFill/>
-          <a:ln/>
-        </p:spPr>
-        <p:txBody>
-          <a:bodyPr wrap="square" lIns="0" tIns="0" rIns="0" bIns="0" rtlCol="0" anchor="ctr"/>
-          <a:lstStyle/>
-          <a:p>
-            <a:pPr indent="0" marL="0">
-              <a:buNone/>
-            </a:pPr>
-            <a:r>
-              <a:rPr lang="en-US" sz="1100" dirty="0">
-                <a:solidFill>
-                  <a:srgbClr val="6B7280"/>
-                </a:solidFill>
-              </a:rPr>
-              <a:t>App Expo en mode web (port 8081)</a:t>
-            </a:r>
-            <a:endParaRPr lang="en-US" sz="1100" dirty="0"/>
-          </a:p>
-        </p:txBody>
-      </p:sp>
-      <p:sp>
-        <p:nvSpPr>
-          <p:cNvPr id="20" name="Text 17"/>
-          <p:cNvSpPr/>
-          <p:nvPr/>
-        </p:nvSpPr>
-        <p:spPr>
-          <a:xfrm>
-            <a:off x="457200" y="3611880"/>
-            <a:ext cx="4663440" cy="320040"/>
-          </a:xfrm>
-          <a:prstGeom prst="rect">
-            <a:avLst/>
-          </a:prstGeom>
-          <a:noFill/>
-          <a:ln/>
-        </p:spPr>
-        <p:txBody>
-          <a:bodyPr wrap="square" lIns="0" tIns="0" rIns="0" bIns="0" rtlCol="0" anchor="ctr"/>
-          <a:lstStyle/>
-          <a:p>
-            <a:pPr indent="0" marL="0">
-              <a:buNone/>
-            </a:pPr>
-            <a:r>
-              <a:rPr lang="en-US" sz="1300" b="1" dirty="0">
-                <a:solidFill>
-                  <a:srgbClr val="1A4731"/>
-                </a:solidFill>
-              </a:rPr>
-              <a:t>Variables d'environnement requises</a:t>
-            </a:r>
-            <a:endParaRPr lang="en-US" sz="1300" dirty="0"/>
-          </a:p>
-        </p:txBody>
-      </p:sp>
-      <p:pic>
-        <p:nvPicPr>
-          <p:cNvPr id="21" name="Image 1" descr="preencoded.png">    </p:cNvPr>
-          <p:cNvPicPr>
-            <a:picLocks noChangeAspect="1"/>
-          </p:cNvPicPr>
-          <p:nvPr/>
-        </p:nvPicPr>
-        <p:blipFill>
-          <a:blip r:embed="rId2"/>
-          <a:stretch>
-            <a:fillRect/>
-          </a:stretch>
-        </p:blipFill>
-        <p:spPr>
-          <a:xfrm>
-            <a:off x="457200" y="3977640"/>
-            <a:ext cx="201168" cy="201168"/>
-          </a:xfrm>
-          <a:prstGeom prst="rect">
-            <a:avLst/>
-          </a:prstGeom>
-        </p:spPr>
-      </p:pic>
-      <p:sp>
-        <p:nvSpPr>
-          <p:cNvPr id="22" name="Text 18"/>
-          <p:cNvSpPr/>
-          <p:nvPr/>
-        </p:nvSpPr>
-        <p:spPr>
-          <a:xfrm>
-            <a:off x="713232" y="3931920"/>
-            <a:ext cx="4389120" cy="274320"/>
-          </a:xfrm>
-          <a:prstGeom prst="rect">
-            <a:avLst/>
-          </a:prstGeom>
-          <a:noFill/>
-          <a:ln/>
-        </p:spPr>
-        <p:txBody>
-          <a:bodyPr wrap="square" lIns="0" tIns="0" rIns="0" bIns="0" rtlCol="0" anchor="ctr"/>
-          <a:lstStyle/>
-          <a:p>
-            <a:pPr indent="0" marL="0">
-              <a:buNone/>
-            </a:pPr>
-            <a:r>
-              <a:rPr lang="en-US" sz="1000" dirty="0">
-                <a:solidFill>
-                  <a:srgbClr val="6B7280"/>
-                </a:solidFill>
-              </a:rPr>
-              <a:t>DATABASE_URL  — Azure PostgreSQL</a:t>
-            </a:r>
-            <a:endParaRPr lang="en-US" sz="1000" dirty="0"/>
-          </a:p>
-        </p:txBody>
-      </p:sp>
-      <p:pic>
-        <p:nvPicPr>
-          <p:cNvPr id="23" name="Image 2" descr="preencoded.png">    </p:cNvPr>
-          <p:cNvPicPr>
-            <a:picLocks noChangeAspect="1"/>
-          </p:cNvPicPr>
-          <p:nvPr/>
-        </p:nvPicPr>
-        <p:blipFill>
-          <a:blip r:embed="rId3"/>
-          <a:stretch>
-            <a:fillRect/>
-          </a:stretch>
-        </p:blipFill>
-        <p:spPr>
-          <a:xfrm>
-            <a:off x="457200" y="3986784"/>
-            <a:ext cx="201168" cy="201168"/>
-          </a:xfrm>
-          <a:prstGeom prst="rect">
-            <a:avLst/>
-          </a:prstGeom>
-        </p:spPr>
-      </p:pic>
-      <p:sp>
-        <p:nvSpPr>
-          <p:cNvPr id="24" name="Text 19"/>
-          <p:cNvSpPr/>
-          <p:nvPr/>
-        </p:nvSpPr>
-        <p:spPr>
-          <a:xfrm>
-            <a:off x="713232" y="3931920"/>
-            <a:ext cx="4389120" cy="274320"/>
-          </a:xfrm>
-          <a:prstGeom prst="rect">
-            <a:avLst/>
-          </a:prstGeom>
-          <a:noFill/>
-          <a:ln/>
-        </p:spPr>
-        <p:txBody>
-          <a:bodyPr wrap="square" lIns="0" tIns="0" rIns="0" bIns="0" rtlCol="0" anchor="ctr"/>
-          <a:lstStyle/>
-          <a:p>
-            <a:pPr indent="0" marL="0">
-              <a:buNone/>
-            </a:pPr>
-            <a:r>
-              <a:rPr lang="en-US" sz="1000" dirty="0">
-                <a:solidFill>
-                  <a:srgbClr val="6B7280"/>
-                </a:solidFill>
-              </a:rPr>
-              <a:t>AZURE_OPENAI_KEY  — Clé Azure OpenAI</a:t>
-            </a:r>
-            <a:endParaRPr lang="en-US" sz="1000" dirty="0"/>
-          </a:p>
-        </p:txBody>
-      </p:sp>
-      <p:pic>
-        <p:nvPicPr>
-          <p:cNvPr id="25" name="Image 3" descr="preencoded.png">    </p:cNvPr>
-          <p:cNvPicPr>
-            <a:picLocks noChangeAspect="1"/>
-          </p:cNvPicPr>
-          <p:nvPr/>
-        </p:nvPicPr>
-        <p:blipFill>
-          <a:blip r:embed="rId4"/>
-          <a:stretch>
-            <a:fillRect/>
-          </a:stretch>
-        </p:blipFill>
-        <p:spPr>
-          <a:xfrm>
-            <a:off x="457200" y="3995928"/>
-            <a:ext cx="201168" cy="201168"/>
-          </a:xfrm>
-          <a:prstGeom prst="rect">
-            <a:avLst/>
-          </a:prstGeom>
-        </p:spPr>
-      </p:pic>
-      <p:sp>
-        <p:nvSpPr>
-          <p:cNvPr id="26" name="Text 20"/>
-          <p:cNvSpPr/>
-          <p:nvPr/>
-        </p:nvSpPr>
-        <p:spPr>
-          <a:xfrm>
-            <a:off x="713232" y="3931920"/>
-            <a:ext cx="4389120" cy="274320"/>
-          </a:xfrm>
-          <a:prstGeom prst="rect">
-            <a:avLst/>
-          </a:prstGeom>
-          <a:noFill/>
-          <a:ln/>
-        </p:spPr>
-        <p:txBody>
-          <a:bodyPr wrap="square" lIns="0" tIns="0" rIns="0" bIns="0" rtlCol="0" anchor="ctr"/>
-          <a:lstStyle/>
-          <a:p>
-            <a:pPr indent="0" marL="0">
-              <a:buNone/>
-            </a:pPr>
-            <a:r>
-              <a:rPr lang="en-US" sz="1000" dirty="0">
-                <a:solidFill>
-                  <a:srgbClr val="6B7280"/>
-                </a:solidFill>
-              </a:rPr>
-              <a:t>JWT_SECRET  — Signature tokens</a:t>
-            </a:r>
-            <a:endParaRPr lang="en-US" sz="1000" dirty="0"/>
-          </a:p>
-        </p:txBody>
-      </p:sp>
-      <p:pic>
-        <p:nvPicPr>
-          <p:cNvPr id="27" name="Image 4" descr="preencoded.png">    </p:cNvPr>
-          <p:cNvPicPr>
-            <a:picLocks noChangeAspect="1"/>
-          </p:cNvPicPr>
-          <p:nvPr/>
-        </p:nvPicPr>
-        <p:blipFill>
-          <a:blip r:embed="rId5"/>
-          <a:stretch>
-            <a:fillRect/>
-          </a:stretch>
-        </p:blipFill>
-        <p:spPr>
-          <a:xfrm>
-            <a:off x="457200" y="4005072"/>
-            <a:ext cx="201168" cy="201168"/>
-          </a:xfrm>
-          <a:prstGeom prst="rect">
-            <a:avLst/>
-          </a:prstGeom>
-        </p:spPr>
-      </p:pic>
-      <p:sp>
-        <p:nvSpPr>
-          <p:cNvPr id="28" name="Text 21"/>
-          <p:cNvSpPr/>
-          <p:nvPr/>
-        </p:nvSpPr>
-        <p:spPr>
-          <a:xfrm>
-            <a:off x="713232" y="3931920"/>
-            <a:ext cx="4389120" cy="274320"/>
-          </a:xfrm>
-          <a:prstGeom prst="rect">
-            <a:avLst/>
-          </a:prstGeom>
-          <a:noFill/>
-          <a:ln/>
-        </p:spPr>
-        <p:txBody>
-          <a:bodyPr wrap="square" lIns="0" tIns="0" rIns="0" bIns="0" rtlCol="0" anchor="ctr"/>
-          <a:lstStyle/>
-          <a:p>
-            <a:pPr indent="0" marL="0">
-              <a:buNone/>
-            </a:pPr>
-            <a:r>
-              <a:rPr lang="en-US" sz="1000" dirty="0">
-                <a:solidFill>
-                  <a:srgbClr val="6B7280"/>
-                </a:solidFill>
-              </a:rPr>
-              <a:t>OPENAI_API_KEY  — Fallback OpenAI</a:t>
-            </a:r>
-            <a:endParaRPr lang="en-US" sz="1000" dirty="0"/>
-          </a:p>
-        </p:txBody>
-      </p:sp>
-      <p:sp>
-        <p:nvSpPr>
-          <p:cNvPr id="29" name="Text 22"/>
-          <p:cNvSpPr/>
-          <p:nvPr/>
-        </p:nvSpPr>
-        <p:spPr>
-          <a:xfrm>
-            <a:off x="457200" y="3977640"/>
-            <a:ext cx="2194560" cy="868680"/>
-          </a:xfrm>
-          <a:prstGeom prst="rect">
-            <a:avLst/>
-          </a:prstGeom>
-          <a:noFill/>
-          <a:ln/>
-        </p:spPr>
-        <p:txBody>
-          <a:bodyPr wrap="square" lIns="0" tIns="0" rIns="0" bIns="0" rtlCol="0" anchor="ctr"/>
-          <a:lstStyle/>
-          <a:p>
-            <a:pPr indent="0" marL="0">
-              <a:buNone/>
-            </a:pPr>
-            <a:r>
-              <a:rPr lang="en-US" sz="1000" b="1" dirty="0">
-                <a:solidFill>
-                  <a:srgbClr val="1A4731"/>
-                </a:solidFill>
-              </a:rPr>
-              <a:t>DATABASE_URL</a:t>
-            </a:r>
-            <a:endParaRPr lang="en-US" sz="1000" dirty="0"/>
-          </a:p>
-          <a:p>
-            <a:pPr indent="0" marL="0">
-              <a:buNone/>
-            </a:pPr>
-            <a:r>
-              <a:rPr lang="en-US" sz="1000" b="1" dirty="0">
-                <a:solidFill>
-                  <a:srgbClr val="1A4731"/>
-                </a:solidFill>
-              </a:rPr>
-              <a:t>AZURE_OPENAI_KEY + AZURE_OPENAI_ENDPOINT</a:t>
-            </a:r>
-            <a:endParaRPr lang="en-US" sz="1000" dirty="0"/>
-          </a:p>
-          <a:p>
-            <a:pPr indent="0" marL="0">
-              <a:buNone/>
-            </a:pPr>
-            <a:r>
-              <a:rPr lang="en-US" sz="1000" b="1" dirty="0">
-                <a:solidFill>
-                  <a:srgbClr val="1A4731"/>
-                </a:solidFill>
-              </a:rPr>
-              <a:t>JWT_SECRET</a:t>
-            </a:r>
-            <a:endParaRPr lang="en-US" sz="1000" dirty="0"/>
-          </a:p>
-          <a:p>
-            <a:pPr indent="0" marL="0">
-              <a:buNone/>
-            </a:pPr>
-            <a:r>
-              <a:rPr lang="en-US" sz="1000" b="1" dirty="0">
-                <a:solidFill>
-                  <a:srgbClr val="1A4731"/>
-                </a:solidFill>
-              </a:rPr>
-              <a:t>OPENAI_API_KEY  (fallback)</a:t>
-            </a:r>
-            <a:endParaRPr lang="en-US" sz="1000" dirty="0"/>
-          </a:p>
-        </p:txBody>
-      </p:sp>
-      <p:sp>
-        <p:nvSpPr>
-          <p:cNvPr id="30" name="Text 23"/>
-          <p:cNvSpPr/>
-          <p:nvPr/>
-        </p:nvSpPr>
-        <p:spPr>
-          <a:xfrm>
-            <a:off x="2743200" y="3977640"/>
-            <a:ext cx="2468880" cy="868680"/>
-          </a:xfrm>
-          <a:prstGeom prst="rect">
-            <a:avLst/>
-          </a:prstGeom>
-          <a:noFill/>
-          <a:ln/>
-        </p:spPr>
-        <p:txBody>
-          <a:bodyPr wrap="square" lIns="0" tIns="0" rIns="0" bIns="0" rtlCol="0" anchor="ctr"/>
-          <a:lstStyle/>
-          <a:p>
-            <a:pPr indent="0" marL="0">
-              <a:buNone/>
-            </a:pPr>
-            <a:r>
-              <a:rPr lang="en-US" sz="1000" dirty="0">
-                <a:solidFill>
-                  <a:srgbClr val="6B7280"/>
-                </a:solidFill>
-              </a:rPr>
-              <a:t>URL PostgreSQL Azure</a:t>
-            </a:r>
-            <a:endParaRPr lang="en-US" sz="1000" dirty="0"/>
-          </a:p>
-          <a:p>
-            <a:pPr indent="0" marL="0">
-              <a:buNone/>
-            </a:pPr>
-            <a:r>
-              <a:rPr lang="en-US" sz="1000" dirty="0">
-                <a:solidFill>
-                  <a:srgbClr val="6B7280"/>
-                </a:solidFill>
-              </a:rPr>
-              <a:t>Clé Azure OpenAI</a:t>
-            </a:r>
-            <a:endParaRPr lang="en-US" sz="1000" dirty="0"/>
-          </a:p>
-          <a:p>
-            <a:pPr indent="0" marL="0">
-              <a:buNone/>
-            </a:pPr>
-            <a:r>
-              <a:rPr lang="en-US" sz="1000" dirty="0">
-                <a:solidFill>
-                  <a:srgbClr val="6B7280"/>
-                </a:solidFill>
-              </a:rPr>
-              <a:t>Signature JWT tokens</a:t>
-            </a:r>
-            <a:endParaRPr lang="en-US" sz="1000" dirty="0"/>
-          </a:p>
-          <a:p>
-            <a:pPr indent="0" marL="0">
-              <a:buNone/>
-            </a:pPr>
-            <a:r>
-              <a:rPr lang="en-US" sz="1000" dirty="0">
-                <a:solidFill>
-                  <a:srgbClr val="6B7280"/>
-                </a:solidFill>
-              </a:rPr>
-              <a:t>Clé OpenAI directe</a:t>
-            </a:r>
-            <a:endParaRPr lang="en-US" sz="1000" dirty="0"/>
-          </a:p>
-        </p:txBody>
-      </p:sp>
-      <p:sp>
-        <p:nvSpPr>
-          <p:cNvPr id="31" name="Shape 24"/>
-          <p:cNvSpPr/>
-          <p:nvPr/>
-        </p:nvSpPr>
-        <p:spPr>
-          <a:xfrm>
-            <a:off x="5577840" y="822960"/>
-            <a:ext cx="3291840" cy="4069080"/>
-          </a:xfrm>
-          <a:prstGeom prst="rect">
-            <a:avLst/>
-          </a:prstGeom>
-          <a:solidFill>
-            <a:srgbClr val="E3F2FD"/>
-          </a:solidFill>
-          <a:ln/>
-          <a:effectLst>
-            <a:outerShdw sx="100000" sy="100000" kx="0" ky="0" algn="bl" rotWithShape="0" blurRad="101600" dist="38100" dir="8100000">
-              <a:srgbClr val="000000">
-                <a:alpha val="12000"/>
-              </a:srgbClr>
-            </a:outerShdw>
-          </a:effectLst>
-        </p:spPr>
-      </p:sp>
-      <p:sp>
-        <p:nvSpPr>
-          <p:cNvPr id="32" name="Shape 25"/>
-          <p:cNvSpPr/>
-          <p:nvPr/>
-        </p:nvSpPr>
-        <p:spPr>
-          <a:xfrm>
-            <a:off x="5577840" y="822960"/>
-            <a:ext cx="3291840" cy="502920"/>
-          </a:xfrm>
-          <a:prstGeom prst="rect">
-            <a:avLst/>
-          </a:prstGeom>
-          <a:solidFill>
-            <a:srgbClr val="01579B"/>
-          </a:solidFill>
-          <a:ln/>
-        </p:spPr>
-      </p:sp>
-      <p:sp>
-        <p:nvSpPr>
-          <p:cNvPr id="33" name="Text 26"/>
-          <p:cNvSpPr/>
-          <p:nvPr/>
-        </p:nvSpPr>
-        <p:spPr>
-          <a:xfrm>
-            <a:off x="5669280" y="822960"/>
-            <a:ext cx="3108960" cy="502920"/>
-          </a:xfrm>
-          <a:prstGeom prst="rect">
-            <a:avLst/>
-          </a:prstGeom>
-          <a:noFill/>
-          <a:ln/>
-        </p:spPr>
-        <p:txBody>
-          <a:bodyPr wrap="square" lIns="0" tIns="0" rIns="0" bIns="0" rtlCol="0" anchor="ctr"/>
-          <a:lstStyle/>
-          <a:p>
-            <a:pPr indent="0" marL="0">
-              <a:buNone/>
-            </a:pPr>
-            <a:r>
-              <a:rPr lang="en-US" sz="1300" b="1" dirty="0">
-                <a:solidFill>
-                  <a:srgbClr val="FFFFFF"/>
-                </a:solidFill>
-              </a:rPr>
-              <a:t>Azure Stack</a:t>
-            </a:r>
-            <a:endParaRPr lang="en-US" sz="1300" dirty="0"/>
-          </a:p>
-        </p:txBody>
-      </p:sp>
-      <p:pic>
-        <p:nvPicPr>
-          <p:cNvPr id="34" name="Image 5" descr="preencoded.png">    </p:cNvPr>
-          <p:cNvPicPr>
-            <a:picLocks noChangeAspect="1"/>
-          </p:cNvPicPr>
-          <p:nvPr/>
-        </p:nvPicPr>
-        <p:blipFill>
-          <a:blip r:embed="rId6"/>
-          <a:stretch>
-            <a:fillRect/>
-          </a:stretch>
-        </p:blipFill>
-        <p:spPr>
-          <a:xfrm>
-            <a:off x="5669280" y="1508760"/>
-            <a:ext cx="347472" cy="347472"/>
-          </a:xfrm>
-          <a:prstGeom prst="rect">
-            <a:avLst/>
-          </a:prstGeom>
-        </p:spPr>
-      </p:pic>
-      <p:sp>
-        <p:nvSpPr>
-          <p:cNvPr id="35" name="Text 27"/>
-          <p:cNvSpPr/>
-          <p:nvPr/>
-        </p:nvSpPr>
-        <p:spPr>
-          <a:xfrm>
-            <a:off x="6080760" y="1463040"/>
-            <a:ext cx="2651760" cy="274320"/>
-          </a:xfrm>
-          <a:prstGeom prst="rect">
-            <a:avLst/>
-          </a:prstGeom>
-          <a:noFill/>
-          <a:ln/>
-        </p:spPr>
-        <p:txBody>
-          <a:bodyPr wrap="square" lIns="0" tIns="0" rIns="0" bIns="0" rtlCol="0" anchor="ctr"/>
-          <a:lstStyle/>
-          <a:p>
-            <a:pPr indent="0" marL="0">
-              <a:buNone/>
-            </a:pPr>
-            <a:r>
-              <a:rPr lang="en-US" sz="1300" b="1" dirty="0">
-                <a:solidFill>
-                  <a:srgbClr val="01579B"/>
-                </a:solidFill>
-              </a:rPr>
-              <a:t>Container Apps</a:t>
-            </a:r>
-            <a:endParaRPr lang="en-US" sz="1300" dirty="0"/>
-          </a:p>
-        </p:txBody>
-      </p:sp>
-      <p:sp>
-        <p:nvSpPr>
-          <p:cNvPr id="36" name="Text 28"/>
-          <p:cNvSpPr/>
-          <p:nvPr/>
-        </p:nvSpPr>
-        <p:spPr>
-          <a:xfrm>
-            <a:off x="6080760" y="1755648"/>
-            <a:ext cx="2651760" cy="320040"/>
-          </a:xfrm>
-          <a:prstGeom prst="rect">
-            <a:avLst/>
-          </a:prstGeom>
-          <a:noFill/>
-          <a:ln/>
-        </p:spPr>
-        <p:txBody>
-          <a:bodyPr wrap="square" lIns="0" tIns="0" rIns="0" bIns="0" rtlCol="0" anchor="ctr"/>
-          <a:lstStyle/>
-          <a:p>
-            <a:pPr indent="0" marL="0">
-              <a:buNone/>
-            </a:pPr>
-            <a:r>
-              <a:rPr lang="en-US" sz="1100" dirty="0">
-                <a:solidFill>
-                  <a:srgbClr val="6B7280"/>
-                </a:solidFill>
-              </a:rPr>
-              <a:t>Hébergement du backend Node.js</a:t>
-            </a:r>
-            <a:endParaRPr lang="en-US" sz="1100" dirty="0"/>
-          </a:p>
-        </p:txBody>
-      </p:sp>
-      <p:pic>
-        <p:nvPicPr>
-          <p:cNvPr id="37" name="Image 6" descr="preencoded.png">    </p:cNvPr>
-          <p:cNvPicPr>
-            <a:picLocks noChangeAspect="1"/>
-          </p:cNvPicPr>
-          <p:nvPr/>
-        </p:nvPicPr>
-        <p:blipFill>
-          <a:blip r:embed="rId7"/>
-          <a:stretch>
-            <a:fillRect/>
-          </a:stretch>
-        </p:blipFill>
-        <p:spPr>
-          <a:xfrm>
-            <a:off x="5669280" y="2331720"/>
-            <a:ext cx="347472" cy="347472"/>
-          </a:xfrm>
-          <a:prstGeom prst="rect">
-            <a:avLst/>
-          </a:prstGeom>
-        </p:spPr>
-      </p:pic>
-      <p:sp>
-        <p:nvSpPr>
-          <p:cNvPr id="38" name="Text 29"/>
-          <p:cNvSpPr/>
-          <p:nvPr/>
-        </p:nvSpPr>
-        <p:spPr>
-          <a:xfrm>
-            <a:off x="6080760" y="2286000"/>
-            <a:ext cx="2651760" cy="274320"/>
-          </a:xfrm>
-          <a:prstGeom prst="rect">
-            <a:avLst/>
-          </a:prstGeom>
-          <a:noFill/>
-          <a:ln/>
-        </p:spPr>
-        <p:txBody>
-          <a:bodyPr wrap="square" lIns="0" tIns="0" rIns="0" bIns="0" rtlCol="0" anchor="ctr"/>
-          <a:lstStyle/>
-          <a:p>
-            <a:pPr indent="0" marL="0">
-              <a:buNone/>
-            </a:pPr>
-            <a:r>
-              <a:rPr lang="en-US" sz="1300" b="1" dirty="0">
-                <a:solidFill>
-                  <a:srgbClr val="01579B"/>
-                </a:solidFill>
-              </a:rPr>
-              <a:t>Azure PostgreSQL</a:t>
-            </a:r>
-            <a:endParaRPr lang="en-US" sz="1300" dirty="0"/>
-          </a:p>
-        </p:txBody>
-      </p:sp>
-      <p:sp>
-        <p:nvSpPr>
-          <p:cNvPr id="39" name="Text 30"/>
-          <p:cNvSpPr/>
-          <p:nvPr/>
-        </p:nvSpPr>
-        <p:spPr>
-          <a:xfrm>
-            <a:off x="6080760" y="2578608"/>
-            <a:ext cx="2651760" cy="320040"/>
-          </a:xfrm>
-          <a:prstGeom prst="rect">
-            <a:avLst/>
-          </a:prstGeom>
-          <a:noFill/>
-          <a:ln/>
-        </p:spPr>
-        <p:txBody>
-          <a:bodyPr wrap="square" lIns="0" tIns="0" rIns="0" bIns="0" rtlCol="0" anchor="ctr"/>
-          <a:lstStyle/>
-          <a:p>
-            <a:pPr indent="0" marL="0">
-              <a:buNone/>
-            </a:pPr>
-            <a:r>
-              <a:rPr lang="en-US" sz="1100" dirty="0">
-                <a:solidFill>
-                  <a:srgbClr val="6B7280"/>
-                </a:solidFill>
-              </a:rPr>
-              <a:t>Base de données cloud sécurisée (SSL)</a:t>
-            </a:r>
-            <a:endParaRPr lang="en-US" sz="1100" dirty="0"/>
-          </a:p>
-        </p:txBody>
-      </p:sp>
-      <p:pic>
-        <p:nvPicPr>
-          <p:cNvPr id="40" name="Image 7" descr="preencoded.png">    </p:cNvPr>
-          <p:cNvPicPr>
-            <a:picLocks noChangeAspect="1"/>
-          </p:cNvPicPr>
-          <p:nvPr/>
-        </p:nvPicPr>
-        <p:blipFill>
-          <a:blip r:embed="rId8"/>
-          <a:stretch>
-            <a:fillRect/>
-          </a:stretch>
-        </p:blipFill>
-        <p:spPr>
-          <a:xfrm>
-            <a:off x="5669280" y="3154680"/>
-            <a:ext cx="347472" cy="347472"/>
-          </a:xfrm>
-          <a:prstGeom prst="rect">
-            <a:avLst/>
-          </a:prstGeom>
-        </p:spPr>
-      </p:pic>
-      <p:sp>
-        <p:nvSpPr>
-          <p:cNvPr id="41" name="Text 31"/>
-          <p:cNvSpPr/>
-          <p:nvPr/>
-        </p:nvSpPr>
-        <p:spPr>
-          <a:xfrm>
-            <a:off x="6080760" y="3108960"/>
-            <a:ext cx="2651760" cy="274320"/>
-          </a:xfrm>
-          <a:prstGeom prst="rect">
-            <a:avLst/>
-          </a:prstGeom>
-          <a:noFill/>
-          <a:ln/>
-        </p:spPr>
-        <p:txBody>
-          <a:bodyPr wrap="square" lIns="0" tIns="0" rIns="0" bIns="0" rtlCol="0" anchor="ctr"/>
-          <a:lstStyle/>
-          <a:p>
-            <a:pPr indent="0" marL="0">
-              <a:buNone/>
-            </a:pPr>
-            <a:r>
-              <a:rPr lang="en-US" sz="1300" b="1" dirty="0">
-                <a:solidFill>
-                  <a:srgbClr val="01579B"/>
-                </a:solidFill>
-              </a:rPr>
-              <a:t>Azure OpenAI</a:t>
-            </a:r>
-            <a:endParaRPr lang="en-US" sz="1300" dirty="0"/>
-          </a:p>
-        </p:txBody>
-      </p:sp>
-      <p:sp>
-        <p:nvSpPr>
-          <p:cNvPr id="42" name="Text 32"/>
-          <p:cNvSpPr/>
-          <p:nvPr/>
-        </p:nvSpPr>
-        <p:spPr>
-          <a:xfrm>
-            <a:off x="6080760" y="3401568"/>
-            <a:ext cx="2651760" cy="320040"/>
-          </a:xfrm>
-          <a:prstGeom prst="rect">
-            <a:avLst/>
-          </a:prstGeom>
-          <a:noFill/>
-          <a:ln/>
-        </p:spPr>
-        <p:txBody>
-          <a:bodyPr wrap="square" lIns="0" tIns="0" rIns="0" bIns="0" rtlCol="0" anchor="ctr"/>
-          <a:lstStyle/>
-          <a:p>
-            <a:pPr indent="0" marL="0">
-              <a:buNone/>
-            </a:pPr>
-            <a:r>
-              <a:rPr lang="en-US" sz="1100" dirty="0">
-                <a:solidFill>
-                  <a:srgbClr val="6B7280"/>
-                </a:solidFill>
-              </a:rPr>
-              <a:t>GPT-4o Vision déployé en instance dédiée</a:t>
-            </a:r>
-            <a:endParaRPr lang="en-US" sz="1100" dirty="0"/>
-          </a:p>
-        </p:txBody>
-      </p:sp>
-      <p:pic>
-        <p:nvPicPr>
-          <p:cNvPr id="43" name="Image 8" descr="preencoded.png">    </p:cNvPr>
-          <p:cNvPicPr>
-            <a:picLocks noChangeAspect="1"/>
-          </p:cNvPicPr>
-          <p:nvPr/>
-        </p:nvPicPr>
-        <p:blipFill>
-          <a:blip r:embed="rId9"/>
-          <a:stretch>
-            <a:fillRect/>
-          </a:stretch>
-        </p:blipFill>
-        <p:spPr>
-          <a:xfrm>
-            <a:off x="5669280" y="3977640"/>
-            <a:ext cx="347472" cy="347472"/>
-          </a:xfrm>
-          <a:prstGeom prst="rect">
-            <a:avLst/>
-          </a:prstGeom>
-        </p:spPr>
-      </p:pic>
-      <p:sp>
-        <p:nvSpPr>
-          <p:cNvPr id="44" name="Text 33"/>
-          <p:cNvSpPr/>
-          <p:nvPr/>
-        </p:nvSpPr>
-        <p:spPr>
-          <a:xfrm>
-            <a:off x="6080760" y="3931920"/>
-            <a:ext cx="2651760" cy="274320"/>
-          </a:xfrm>
-          <a:prstGeom prst="rect">
-            <a:avLst/>
-          </a:prstGeom>
-          <a:noFill/>
-          <a:ln/>
-        </p:spPr>
-        <p:txBody>
-          <a:bodyPr wrap="square" lIns="0" tIns="0" rIns="0" bIns="0" rtlCol="0" anchor="ctr"/>
-          <a:lstStyle/>
-          <a:p>
-            <a:pPr indent="0" marL="0">
-              <a:buNone/>
-            </a:pPr>
-            <a:r>
-              <a:rPr lang="en-US" sz="1300" b="1" dirty="0">
-                <a:solidFill>
-                  <a:srgbClr val="01579B"/>
-                </a:solidFill>
-              </a:rPr>
-              <a:t>Azure VPN / SSL</a:t>
-            </a:r>
-            <a:endParaRPr lang="en-US" sz="1300" dirty="0"/>
-          </a:p>
-        </p:txBody>
-      </p:sp>
-      <p:sp>
-        <p:nvSpPr>
-          <p:cNvPr id="45" name="Text 34"/>
-          <p:cNvSpPr/>
-          <p:nvPr/>
-        </p:nvSpPr>
-        <p:spPr>
-          <a:xfrm>
-            <a:off x="6080760" y="4224528"/>
-            <a:ext cx="2651760" cy="320040"/>
-          </a:xfrm>
-          <a:prstGeom prst="rect">
-            <a:avLst/>
-          </a:prstGeom>
-          <a:noFill/>
-          <a:ln/>
-        </p:spPr>
-        <p:txBody>
-          <a:bodyPr wrap="square" lIns="0" tIns="0" rIns="0" bIns="0" rtlCol="0" anchor="ctr"/>
-          <a:lstStyle/>
-          <a:p>
-            <a:pPr indent="0" marL="0">
-              <a:buNone/>
-            </a:pPr>
-            <a:r>
-              <a:rPr lang="en-US" sz="1100" dirty="0">
-                <a:solidFill>
-                  <a:srgbClr val="6B7280"/>
-                </a:solidFill>
-              </a:rPr>
-              <a:t>Accès sécurisé + certificats TLS</a:t>
-            </a:r>
-            <a:endParaRPr lang="en-US" sz="1100" dirty="0"/>
-          </a:p>
-        </p:txBody>
-      </p:sp>
-    </p:spTree>
-  </p:cSld>
-  <p:clrMapOvr>
-    <a:masterClrMapping/>
-  </p:clrMapOvr>
-</p:sld>
+<file path=ppt/slides/slide7.xml><?xml version="1.0" encoding="UTF-8" standalone="yes"?>
+<p:sld xmlns:a="http://schemas.openxmlformats.org/drawingml/2006/main" xmlns:r="http://schemas.openxmlformats.org/officeDocument/2006/relationships" xmlns:p="http://schemas.openxmlformats.org/presentationml/2006/main"><p:cSld name="Slide 7"><p:bg><p:bgPr><a:solidFill><a:srgbClr val="F9FAFB"/></a:solidFill></p:bgPr></p:bg><p:spTree><p:nvGrpSpPr><p:cNvPr id="1" name=""/><p:cNvGrpSpPr/><p:nvPr/></p:nvGrpSpPr><p:grpSpPr><a:xfrm><a:off x="0" y="0"/><a:ext cx="0" cy="0"/><a:chOff x="0" y="0"/><a:chExt cx="0" cy="0"/></a:xfrm></p:grpSpPr><p:sp><p:nvSpPr><p:cNvPr id="2" name="Shape 0"></p:cNvPr><p:cNvSpPr/><p:nvPr></p:nvPr></p:nvSpPr><p:spPr><a:xfrm><a:off x="0" y="0"/><a:ext cx="9144000" cy="685800"/></a:xfrm><a:prstGeom prst="rect"><a:avLst></a:avLst></a:prstGeom><a:solidFill><a:srgbClr val="1A4731"/></a:solidFill><a:ln></a:ln></p:spPr></p:sp><p:sp><p:nvSpPr><p:cNvPr id="3" name="Text 1"></p:cNvPr><p:cNvSpPr/><p:nvPr></p:nvPr></p:nvSpPr><p:spPr><a:xfrm><a:off x="365760" y="0"/><a:ext cx="8229600" cy="685800"/></a:xfrm><a:prstGeom prst="rect"><a:avLst></a:avLst></a:prstGeom><a:noFill/><a:ln></a:ln></p:spPr><p:txBody><a:bodyPr wrap="square" lIns="0" tIns="0" rIns="0" bIns="0" rtlCol="0" anchor="ctr"></a:bodyPr><a:lstStyle/><a:p><a:pPr indent="0" marL="0"><a:buNone/></a:pPr><a:r><a:rPr lang="en-US" sz="2200" b="1" dirty="0"><a:solidFill><a:srgbClr val="FFFFFF"/></a:solidFill></a:rPr><a:t>Déploiement Cloud &amp; Infrastructure</a:t></a:r><a:endParaRPr lang="en-US" sz="2200" dirty="0"/></a:p></p:txBody></p:sp><p:sp><p:nvSpPr><p:cNvPr id="4" name="Shape 2"></p:cNvPr><p:cNvSpPr/><p:nvPr></p:nvPr></p:nvSpPr><p:spPr><a:xfrm><a:off x="274320" y="822960"/><a:ext cx="5120640" cy="4069080"/></a:xfrm><a:prstGeom prst="rect"><a:avLst></a:avLst></a:prstGeom><a:solidFill><a:srgbClr val="FFFFFF"/></a:solidFill><a:ln></a:ln><a:effectLst> <a:outerShdw sx="100000" sy="100000" kx="0" ky="0" algn="bl" rotWithShape="0" blurRad="101600" dist="38100" dir="8100000"> <a:srgbClr val="000000"> <a:alpha val="12000"/></a:srgbClr> </a:outerShdw></a:effectLst></p:spPr></p:sp><p:sp><p:nvSpPr><p:cNvPr id="5" name="Shape 3"></p:cNvPr><p:cNvSpPr/><p:nvPr></p:nvPr></p:nvSpPr><p:spPr><a:xfrm><a:off x="274320" y="822960"/><a:ext cx="5120640" cy="502920"/></a:xfrm><a:prstGeom prst="rect"><a:avLst></a:avLst></a:prstGeom><a:solidFill><a:srgbClr val="0277BD"/></a:solidFill><a:ln></a:ln></p:spPr></p:sp><p:pic>  <p:nvPicPr><p:cNvPr id="6" name="Image 0" descr="preencoded.png">    </p:cNvPr>    <p:cNvPicPr><a:picLocks noChangeAspect="1"/></p:cNvPicPr>    <p:nvPr></p:nvPr>  </p:nvPicPr><p:blipFill><a:blip r:embed="rId1"></a:blip>  <a:stretch><a:fillRect/></a:stretch></p:blipFill><p:spPr> <a:xfrm>  <a:off x="365760" y="886968"/>  <a:ext cx="347472" cy="347472"/> </a:xfrm> <a:prstGeom prst="rect"><a:avLst/></a:prstGeom></p:spPr></p:pic><p:sp><p:nvSpPr><p:cNvPr id="7" name="Text 4"></p:cNvPr><p:cNvSpPr/><p:nvPr></p:nvPr></p:nvSpPr><p:spPr><a:xfrm><a:off x="777240" y="822960"/><a:ext cx="4572000" cy="502920"/></a:xfrm><a:prstGeom prst="rect"><a:avLst></a:avLst></a:prstGeom><a:noFill/><a:ln></a:ln></p:spPr><p:txBody><a:bodyPr wrap="square" lIns="0" tIns="0" rIns="0" bIns="0" rtlCol="0" anchor="ctr"></a:bodyPr><a:lstStyle/><a:p><a:pPr indent="0" marL="0"><a:buNone/></a:pPr><a:r><a:rPr lang="en-US" sz="1300" b="1" dirty="0"><a:solidFill><a:srgbClr val="FFFFFF"/></a:solidFill></a:rPr><a:t>Docker Compose — Profils de déploiement</a:t></a:r><a:endParaRPr lang="en-US" sz="1300" dirty="0"/></a:p></p:txBody></p:sp><p:sp><p:nvSpPr><p:cNvPr id="8" name="Shape 5"></p:cNvPr><p:cNvSpPr/><p:nvPr></p:nvPr></p:nvSpPr><p:spPr><a:xfrm><a:off x="457200" y="1463040"/><a:ext cx="4754880" cy="548640"/></a:xfrm><a:prstGeom prst="rect"><a:avLst></a:avLst></a:prstGeom><a:solidFill><a:srgbClr val="F9FAFB"/></a:solidFill><a:ln></a:ln></p:spPr></p:sp><p:sp><p:nvSpPr><p:cNvPr id="9" name="Shape 6"></p:cNvPr><p:cNvSpPr/><p:nvPr></p:nvPr></p:nvSpPr><p:spPr><a:xfrm><a:off x="457200" y="1463040"/><a:ext cx="64008" cy="548640"/></a:xfrm><a:prstGeom prst="rect"><a:avLst></a:avLst></a:prstGeom><a:solidFill><a:srgbClr val="1B5E20"/></a:solidFill><a:ln></a:ln></p:spPr></p:sp><p:sp><p:nvSpPr><p:cNvPr id="10" name="Text 7"></p:cNvPr><p:cNvSpPr/><p:nvPr></p:nvPr></p:nvSpPr><p:spPr><a:xfrm><a:off x="594360" y="1481328"/><a:ext cx="3200400" cy="256032"/></a:xfrm><a:prstGeom prst="rect"><a:avLst></a:avLst></a:prstGeom><a:noFill/><a:ln></a:ln></p:spPr><p:txBody><a:bodyPr wrap="square" lIns="0" tIns="0" rIns="0" bIns="0" rtlCol="0" anchor="ctr"></a:bodyPr><a:lstStyle/><a:p><a:pPr indent="0" marL="0"><a:buNone/></a:pPr><a:r><a:rPr lang="en-US" sz="1100" b="1" dirty="0"><a:solidFill><a:srgbClr val="1B5E20"/></a:solidFill><a:latin typeface="Consolas" pitchFamily="34" charset="0"/><a:ea typeface="Consolas" pitchFamily="34" charset="-122"/><a:cs typeface="Consolas" pitchFamily="34" charset="-120"/></a:rPr><a:t>DATABASE_URL=&lt;azure_url&gt; docker compose up</a:t></a:r><a:endParaRPr lang="en-US" sz="1200" dirty="0"/></a:p></p:txBody></p:sp> via DATABASE_URL</a:t></a:r><a:endParaRPr lang="en-US" sz="1100" dirty="0"/></a:p></p:txBody></p:sp><p:sp><p:nvSpPr><p:cNvPr id="16" name="Shape 13"></p:cNvPr><p:cNvSpPr/><p:nvPr></p:nvPr></p:nvSpPr><p:spPr><a:xfrm><a:off x="457200" y="2834640"/><a:ext cx="4754880" cy="548640"/></a:xfrm><a:prstGeom prst="rect"><a:avLst></a:avLst></a:prstGeom><a:solidFill><a:srgbClr val="F9FAFB"/></a:solidFill><a:ln></a:ln></p:spPr></p:sp><p:sp><p:nvSpPr><p:cNvPr id="17" name="Shape 14"></p:cNvPr><p:cNvSpPr/><p:nvPr></p:nvPr></p:nvSpPr><p:spPr><a:xfrm><a:off x="457200" y="2834640"/><a:ext cx="64008" cy="548640"/></a:xfrm><a:prstGeom prst="rect"><a:avLst></a:avLst></a:prstGeom><a:solidFill><a:srgbClr val="E65100"/></a:solidFill><a:ln></a:ln></p:spPr></p:sp><p:sp><p:nvSpPr><p:cNvPr id="18" name="Text 15"></p:cNvPr><p:cNvSpPr/><p:nvPr></p:nvPr></p:nvSpPr><p:spPr><a:xfrm><a:off x="594360" y="2852928"/><a:ext cx="3200400" cy="256032"/></a:xfrm><a:prstGeom prst="rect"><a:avLst></a:avLst></a:prstGeom><a:noFill/><a:ln></a:ln></p:spPr><p:txBody><a:bodyPr wrap="square" lIns="0" tIns="0" rIns="0" bIns="0" rtlCol="0" anchor="ctr"></a:bodyPr><a:lstStyle/><a:p><a:pPr indent="0" marL="0"><a:buNone/></a:pPr><a:r><a:rPr lang="en-US" sz="1100" b="1" dirty="0"><a:solidFill><a:srgbClr val="E65100"/></a:solidFill><a:latin typeface="Consolas" pitchFamily="34" charset="0"/><a:ea typeface="Consolas" pitchFamily="34" charset="-122"/><a:cs typeface="Consolas" pitchFamily="34" charset="-120"/></a:rPr><a:t>--profile mobile</a:t></a:r><a:endParaRPr lang="en-US" sz="1100" dirty="0"/></a:p></p:txBody></p:sp><p:sp><p:nvSpPr><p:cNvPr id="19" name="Text 16"></p:cNvPr><p:cNvSpPr/><p:nvPr></p:nvPr></p:nvSpPr><p:spPr><a:xfrm><a:off x="594360" y="3108960"/><a:ext cx="4572000" cy="256032"/></a:xfrm><a:prstGeom prst="rect"><a:avLst></a:avLst></a:prstGeom><a:noFill/><a:ln></a:ln></p:spPr><p:txBody><a:bodyPr wrap="square" lIns="0" tIns="0" rIns="0" bIns="0" rtlCol="0" anchor="ctr"></a:bodyPr><a:lstStyle/><a:p><a:pPr indent="0" marL="0"><a:buNone/></a:pPr><a:r><a:rPr lang="en-US" sz="1100" dirty="0"><a:solidFill><a:srgbClr val="6B7280"/></a:solidFill></a:rPr><a:t>App Expo en mode web (port 8081)</a:t></a:r><a:endParaRPr lang="en-US" sz="1100" dirty="0"/></a:p></p:txBody></p:sp><p:sp><p:nvSpPr><p:cNvPr id="20" name="Text 17"></p:cNvPr><p:cNvSpPr/><p:nvPr></p:nvPr></p:nvSpPr><p:spPr><a:xfrm><a:off x="457200" y="3611880"/><a:ext cx="4663440" cy="320040"/></a:xfrm><a:prstGeom prst="rect"><a:avLst></a:avLst></a:prstGeom><a:noFill/><a:ln></a:ln></p:spPr><p:txBody><a:bodyPr wrap="square" lIns="0" tIns="0" rIns="0" bIns="0" rtlCol="0" anchor="ctr"></a:bodyPr><a:lstStyle/><a:p><a:pPr indent="0" marL="0"><a:buNone/></a:pPr><a:r><a:rPr lang="en-US" sz="1300" b="1" dirty="0"><a:solidFill><a:srgbClr val="1A4731"/></a:solidFill></a:rPr><a:t>Variables d&apos;environnement requises</a:t></a:r><a:endParaRPr lang="en-US" sz="1300" dirty="0"/></a:p></p:txBody></p:sp><p:pic>  <p:nvPicPr><p:cNvPr id="21" name="Image 1" descr="preencoded.png">    </p:cNvPr>    <p:cNvPicPr><a:picLocks noChangeAspect="1"/></p:cNvPicPr>    <p:nvPr></p:nvPr>  </p:nvPicPr><p:blipFill><a:blip r:embed="rId2"></a:blip>  <a:stretch><a:fillRect/></a:stretch></p:blipFill><p:spPr> <a:xfrm>  <a:off x="457200" y="3977640"/>  <a:ext cx="201168" cy="201168"/> </a:xfrm> <a:prstGeom prst="rect"><a:avLst/></a:prstGeom></p:spPr></p:pic><p:sp><p:nvSpPr><p:cNvPr id="22" name="Text 18"></p:cNvPr><p:cNvSpPr/><p:nvPr></p:nvPr></p:nvSpPr><p:spPr><a:xfrm><a:off x="713232" y="3931920"/><a:ext cx="4389120" cy="274320"/></a:xfrm><a:prstGeom prst="rect"><a:avLst></a:avLst></a:prstGeom><a:noFill/><a:ln></a:ln></p:spPr><p:txBody><a:bodyPr wrap="square" lIns="0" tIns="0" rIns="0" bIns="0" rtlCol="0" anchor="ctr"></a:bodyPr><a:lstStyle/><a:p><a:pPr indent="0" marL="0"><a:buNone/></a:pPr><a:r><a:rPr lang="en-US" sz="1000" dirty="0"><a:solidFill><a:srgbClr val="6B7280"/></a:solidFill></a:rPr><a:t>DATABASE_URL  — Azure PostgreSQL</a:t></a:r><a:endParaRPr lang="en-US" sz="1000" dirty="0"/></a:p></p:txBody></p:sp><p:pic>  <p:nvPicPr><p:cNvPr id="23" name="Image 2" descr="preencoded.png">    </p:cNvPr>    <p:cNvPicPr><a:picLocks noChangeAspect="1"/></p:cNvPicPr>    <p:nvPr></p:nvPr>  </p:nvPicPr><p:blipFill><a:blip r:embed="rId3"></a:blip>  <a:stretch><a:fillRect/></a:stretch></p:blipFill><p:spPr> <a:xfrm>  <a:off x="457200" y="3986784"/>  <a:ext cx="201168" cy="201168"/> </a:xfrm> <a:prstGeom prst="rect"><a:avLst/></a:prstGeom></p:spPr></p:pic><p:sp><p:nvSpPr><p:cNvPr id="24" name="Text 19"></p:cNvPr><p:cNvSpPr/><p:nvPr></p:nvPr></p:nvSpPr><p:spPr><a:xfrm><a:off x="713232" y="3931920"/><a:ext cx="4389120" cy="274320"/></a:xfrm><a:prstGeom prst="rect"><a:avLst></a:avLst></a:prstGeom><a:noFill/><a:ln></a:ln></p:spPr><p:txBody><a:bodyPr wrap="square" lIns="0" tIns="0" rIns="0" bIns="0" rtlCol="0" anchor="ctr"></a:bodyPr><a:lstStyle/><a:p><a:pPr indent="0" marL="0"><a:buNone/></a:pPr><a:r><a:rPr lang="en-US" sz="1000" dirty="0"><a:solidFill><a:srgbClr val="6B7280"/></a:solidFill></a:rPr><a:t>AZURE_OPENAI_KEY  — Clé Azure OpenAI</a:t></a:r><a:endParaRPr lang="en-US" sz="1000" dirty="0"/></a:p></p:txBody></p:sp><p:pic>  <p:nvPicPr><p:cNvPr id="25" name="Image 3" descr="preencoded.png">    </p:cNvPr>    <p:cNvPicPr><a:picLocks noChangeAspect="1"/></p:cNvPicPr>    <p:nvPr></p:nvPr>  </p:nvPicPr><p:blipFill><a:blip r:embed="rId4"></a:blip>  <a:stretch><a:fillRect/></a:stretch></p:blipFill><p:spPr> <a:xfrm>  <a:off x="457200" y="3995928"/>  <a:ext cx="201168" cy="201168"/> </a:xfrm> <a:prstGeom prst="rect"><a:avLst/></a:prstGeom></p:spPr></p:pic><p:sp><p:nvSpPr><p:cNvPr id="26" name="Text 20"></p:cNvPr><p:cNvSpPr/><p:nvPr></p:nvPr></p:nvSpPr><p:spPr><a:xfrm><a:off x="713232" y="3931920"/><a:ext cx="4389120" cy="274320"/></a:xfrm><a:prstGeom prst="rect"><a:avLst></a:avLst></a:prstGeom><a:noFill/><a:ln></a:ln></p:spPr><p:txBody><a:bodyPr wrap="square" lIns="0" tIns="0" rIns="0" bIns="0" rtlCol="0" anchor="ctr"></a:bodyPr><a:lstStyle/><a:p><a:pPr indent="0" marL="0"><a:buNone/></a:pPr><a:r><a:rPr lang="en-US" sz="1000" dirty="0"><a:solidFill><a:srgbClr val="6B7280"/></a:solidFill></a:rPr><a:t>JWT_SECRET  — Signature tokens</a:t></a:r><a:endParaRPr lang="en-US" sz="1000" dirty="0"/></a:p></p:txBody></p:sp><p:pic>  <p:nvPicPr><p:cNvPr id="27" name="Image 4" descr="preencoded.png">    </p:cNvPr>    <p:cNvPicPr><a:picLocks noChangeAspect="1"/></p:cNvPicPr>    <p:nvPr></p:nvPr>  </p:nvPicPr><p:blipFill><a:blip r:embed="rId5"></a:blip>  <a:stretch><a:fillRect/></a:stretch></p:blipFill><p:spPr> <a:xfrm>  <a:off x="457200" y="4005072"/>  <a:ext cx="201168" cy="201168"/> </a:xfrm> <a:prstGeom prst="rect"><a:avLst/></a:prstGeom></p:spPr></p:pic><p:sp><p:nvSpPr><p:cNvPr id="28" name="Text 21"></p:cNvPr><p:cNvSpPr/><p:nvPr></p:nvPr></p:nvSpPr><p:spPr><a:xfrm><a:off x="713232" y="3931920"/><a:ext cx="4389120" cy="274320"/></a:xfrm><a:prstGeom prst="rect"><a:avLst></a:avLst></a:prstGeom><a:noFill/><a:ln></a:ln></p:spPr><p:txBody><a:bodyPr wrap="square" lIns="0" tIns="0" rIns="0" bIns="0" rtlCol="0" anchor="ctr"></a:bodyPr><a:lstStyle/><a:p><a:pPr indent="0" marL="0"><a:buNone/></a:pPr><a:r><a:rPr lang="en-US" sz="1000" dirty="0"><a:solidFill><a:srgbClr val="6B7280"/></a:solidFill></a:rPr><a:t>OPENAI_API_KEY  — Fallback OpenAI</a:t></a:r><a:endParaRPr lang="en-US" sz="1000" dirty="0"/></a:p></p:txBody></p:sp><p:sp><p:nvSpPr><p:cNvPr id="29" name="Text 22"></p:cNvPr><p:cNvSpPr/><p:nvPr></p:nvPr></p:nvSpPr><p:spPr><a:xfrm><a:off x="457200" y="3977640"/><a:ext cx="2194560" cy="868680"/></a:xfrm><a:prstGeom prst="rect"><a:avLst></a:avLst></a:prstGeom><a:noFill/><a:ln></a:ln></p:spPr><p:txBody><a:bodyPr wrap="square" lIns="0" tIns="0" rIns="0" bIns="0" rtlCol="0" anchor="ctr"></a:bodyPr><a:lstStyle/><a:p><a:pPr indent="0" marL="0"><a:buNone/></a:pPr><a:r><a:rPr lang="en-US" sz="1000" b="1" dirty="0"><a:solidFill><a:srgbClr val="1A4731"/></a:solidFill></a:rPr><a:t>DATABASE_URL</a:t></a:r><a:endParaRPr lang="en-US" sz="1000" dirty="0"/></a:p><a:p><a:pPr indent="0" marL="0"><a:buNone/></a:pPr><a:r><a:rPr lang="en-US" sz="1000" b="1" dirty="0"><a:solidFill><a:srgbClr val="1A4731"/></a:solidFill></a:rPr><a:t>AZURE_OPENAI_KEY + AZURE_OPENAI_ENDPOINT</a:t></a:r><a:endParaRPr lang="en-US" sz="1000" dirty="0"/></a:p><a:p><a:pPr indent="0" marL="0"><a:buNone/></a:pPr><a:r><a:rPr lang="en-US" sz="1000" b="1" dirty="0"><a:solidFill><a:srgbClr val="1A4731"/></a:solidFill></a:rPr><a:t>JWT_SECRET</a:t></a:r><a:endParaRPr lang="en-US" sz="1000" dirty="0"/></a:p><a:p><a:pPr indent="0" marL="0"><a:buNone/></a:pPr><a:r><a:rPr lang="en-US" sz="1000" b="1" dirty="0"><a:solidFill><a:srgbClr val="1A4731"/></a:solidFill></a:rPr><a:t>OPENAI_API_KEY  (fallback)</a:t></a:r><a:endParaRPr lang="en-US" sz="1000" dirty="0"/></a:p></p:txBody></p:sp><p:sp><p:nvSpPr><p:cNvPr id="30" name="Text 23"></p:cNvPr><p:cNvSpPr/><p:nvPr></p:nvPr></p:nvSpPr><p:spPr><a:xfrm><a:off x="2743200" y="3977640"/><a:ext cx="2468880" cy="868680"/></a:xfrm><a:prstGeom prst="rect"><a:avLst></a:avLst></a:prstGeom><a:noFill/><a:ln></a:ln></p:spPr><p:txBody><a:bodyPr wrap="square" lIns="0" tIns="0" rIns="0" bIns="0" rtlCol="0" anchor="ctr"></a:bodyPr><a:lstStyle/><a:p><a:pPr indent="0" marL="0"><a:buNone/></a:pPr><a:r><a:rPr lang="en-US" sz="1000" dirty="0"><a:solidFill><a:srgbClr val="6B7280"/></a:solidFill></a:rPr><a:t>URL PostgreSQL Azure</a:t></a:r><a:endParaRPr lang="en-US" sz="1000" dirty="0"/></a:p><a:p><a:pPr indent="0" marL="0"><a:buNone/></a:pPr><a:r><a:rPr lang="en-US" sz="1000" dirty="0"><a:solidFill><a:srgbClr val="6B7280"/></a:solidFill></a:rPr><a:t>Clé Azure OpenAI</a:t></a:r><a:endParaRPr lang="en-US" sz="1000" dirty="0"/></a:p><a:p><a:pPr indent="0" marL="0"><a:buNone/></a:pPr><a:r><a:rPr lang="en-US" sz="1000" dirty="0"><a:solidFill><a:srgbClr val="6B7280"/></a:solidFill></a:rPr><a:t>Signature JWT tokens</a:t></a:r><a:endParaRPr lang="en-US" sz="1000" dirty="0"/></a:p><a:p><a:pPr indent="0" marL="0"><a:buNone/></a:pPr><a:r><a:rPr lang="en-US" sz="1000" dirty="0"><a:solidFill><a:srgbClr val="6B7280"/></a:solidFill></a:rPr><a:t>Clé OpenAI directe</a:t></a:r><a:endParaRPr lang="en-US" sz="1000" dirty="0"/></a:p></p:txBody></p:sp><p:sp><p:nvSpPr><p:cNvPr id="31" name="Shape 24"></p:cNvPr><p:cNvSpPr/><p:nvPr></p:nvPr></p:nvSpPr><p:spPr><a:xfrm><a:off x="5577840" y="822960"/><a:ext cx="3291840" cy="4069080"/></a:xfrm><a:prstGeom prst="rect"><a:avLst></a:avLst></a:prstGeom><a:solidFill><a:srgbClr val="E3F2FD"/></a:solidFill><a:ln></a:ln><a:effectLst> <a:outerShdw sx="100000" sy="100000" kx="0" ky="0" algn="bl" rotWithShape="0" blurRad="101600" dist="38100" dir="8100000"> <a:srgbClr val="000000"> <a:alpha val="12000"/></a:srgbClr> </a:outerShdw></a:effectLst></p:spPr></p:sp><p:sp><p:nvSpPr><p:cNvPr id="32" name="Shape 25"></p:cNvPr><p:cNvSpPr/><p:nvPr></p:nvPr></p:nvSpPr><p:spPr><a:xfrm><a:off x="5577840" y="822960"/><a:ext cx="3291840" cy="502920"/></a:xfrm><a:prstGeom prst="rect"><a:avLst></a:avLst></a:prstGeom><a:solidFill><a:srgbClr val="01579B"/></a:solidFill><a:ln></a:ln></p:spPr></p:sp><p:sp><p:nvSpPr><p:cNvPr id="33" name="Text 26"></p:cNvPr><p:cNvSpPr/><p:nvPr></p:nvPr></p:nvSpPr><p:spPr><a:xfrm><a:off x="5669280" y="822960"/><a:ext cx="3108960" cy="502920"/></a:xfrm><a:prstGeom prst="rect"><a:avLst></a:avLst></a:prstGeom><a:noFill/><a:ln></a:ln></p:spPr><p:txBody><a:bodyPr wrap="square" lIns="0" tIns="0" rIns="0" bIns="0" rtlCol="0" anchor="ctr"></a:bodyPr><a:lstStyle/><a:p><a:pPr indent="0" marL="0"><a:buNone/></a:pPr><a:r><a:rPr lang="en-US" sz="1300" b="1" dirty="0"><a:solidFill><a:srgbClr val="FFFFFF"/></a:solidFill></a:rPr><a:t>Azure Stack</a:t></a:r><a:endParaRPr lang="en-US" sz="1300" dirty="0"/></a:p></p:txBody></p:sp><p:pic>  <p:nvPicPr><p:cNvPr id="34" name="Image 5" descr="preencoded.png">    </p:cNvPr>    <p:cNvPicPr><a:picLocks noChangeAspect="1"/></p:cNvPicPr>    <p:nvPr></p:nvPr>  </p:nvPicPr><p:blipFill><a:blip r:embed="rId6"></a:blip>  <a:stretch><a:fillRect/></a:stretch></p:blipFill><p:spPr> <a:xfrm>  <a:off x="5669280" y="1508760"/>  <a:ext cx="347472" cy="347472"/> </a:xfrm> <a:prstGeom prst="rect"><a:avLst/></a:prstGeom></p:spPr></p:pic><p:sp><p:nvSpPr><p:cNvPr id="35" name="Text 27"></p:cNvPr><p:cNvSpPr/><p:nvPr></p:nvPr></p:nvSpPr><p:spPr><a:xfrm><a:off x="6080760" y="1463040"/><a:ext cx="2651760" cy="274320"/></a:xfrm><a:prstGeom prst="rect"><a:avLst></a:avLst></a:prstGeom><a:noFill/><a:ln></a:ln></p:spPr><p:txBody><a:bodyPr wrap="square" lIns="0" tIns="0" rIns="0" bIns="0" rtlCol="0" anchor="ctr"></a:bodyPr><a:lstStyle/><a:p><a:pPr indent="0" marL="0"><a:buNone/></a:pPr><a:r><a:rPr lang="en-US" sz="1300" b="1" dirty="0"><a:solidFill><a:srgbClr val="01579B"/></a:solidFill></a:rPr><a:t>Container Apps</a:t></a:r><a:endParaRPr lang="en-US" sz="1300" dirty="0"/></a:p></p:txBody></p:sp><p:sp><p:nvSpPr><p:cNvPr id="36" name="Text 28"></p:cNvPr><p:cNvSpPr/><p:nvPr></p:nvPr></p:nvSpPr><p:spPr><a:xfrm><a:off x="6080760" y="1755648"/><a:ext cx="2651760" cy="320040"/></a:xfrm><a:prstGeom prst="rect"><a:avLst></a:avLst></a:prstGeom><a:noFill/><a:ln></a:ln></p:spPr><p:txBody><a:bodyPr wrap="square" lIns="0" tIns="0" rIns="0" bIns="0" rtlCol="0" anchor="ctr"></a:bodyPr><a:lstStyle/><a:p><a:pPr indent="0" marL="0"><a:buNone/></a:pPr><a:r><a:rPr lang="en-US" sz="1100" dirty="0"><a:solidFill><a:srgbClr val="6B7280"/></a:solidFill></a:rPr><a:t>Hébergement du backend Node.js</a:t></a:r><a:endParaRPr lang="en-US" sz="1100" dirty="0"/></a:p></p:txBody></p:sp><p:pic>  <p:nvPicPr><p:cNvPr id="37" name="Image 6" descr="preencoded.png">    </p:cNvPr>    <p:cNvPicPr><a:picLocks noChangeAspect="1"/></p:cNvPicPr>    <p:nvPr></p:nvPr>  </p:nvPicPr><p:blipFill><a:blip r:embed="rId7"></a:blip>  <a:stretch><a:fillRect/></a:stretch></p:blipFill><p:spPr> <a:xfrm>  <a:off x="5669280" y="2331720"/>  <a:ext cx="347472" cy="347472"/> </a:xfrm> <a:prstGeom prst="rect"><a:avLst/></a:prstGeom></p:spPr></p:pic><p:sp><p:nvSpPr><p:cNvPr id="38" name="Text 29"></p:cNvPr><p:cNvSpPr/><p:nvPr></p:nvPr></p:nvSpPr><p:spPr><a:xfrm><a:off x="6080760" y="2286000"/><a:ext cx="2651760" cy="274320"/></a:xfrm><a:prstGeom prst="rect"><a:avLst></a:avLst></a:prstGeom><a:noFill/><a:ln></a:ln></p:spPr><p:txBody><a:bodyPr wrap="square" lIns="0" tIns="0" rIns="0" bIns="0" rtlCol="0" anchor="ctr"></a:bodyPr><a:lstStyle/><a:p><a:pPr indent="0" marL="0"><a:buNone/></a:pPr><a:r><a:rPr lang="en-US" sz="1300" b="1" dirty="0"><a:solidFill><a:srgbClr val="01579B"/></a:solidFill></a:rPr><a:t>Azure PostgreSQL</a:t></a:r><a:endParaRPr lang="en-US" sz="1300" dirty="0"/></a:p></p:txBody></p:sp><p:sp><p:nvSpPr><p:cNvPr id="39" name="Text 30"></p:cNvPr><p:cNvSpPr/><p:nvPr></p:nvPr></p:nvSpPr><p:spPr><a:xfrm><a:off x="6080760" y="2578608"/><a:ext cx="2651760" cy="320040"/></a:xfrm><a:prstGeom prst="rect"><a:avLst></a:avLst></a:prstGeom><a:noFill/><a:ln></a:ln></p:spPr><p:txBody><a:bodyPr wrap="square" lIns="0" tIns="0" rIns="0" bIns="0" rtlCol="0" anchor="ctr"></a:bodyPr><a:lstStyle/><a:p><a:pPr indent="0" marL="0"><a:buNone/></a:pPr><a:r><a:rPr lang="en-US" sz="1100" dirty="0"><a:solidFill><a:srgbClr val="6B7280"/></a:solidFill></a:rPr><a:t>Base de données cloud sécurisée (SSL)</a:t></a:r><a:endParaRPr lang="en-US" sz="1100" dirty="0"/></a:p></p:txBody></p:sp><p:pic>  <p:nvPicPr><p:cNvPr id="40" name="Image 7" descr="preencoded.png">    </p:cNvPr>    <p:cNvPicPr><a:picLocks noChangeAspect="1"/></p:cNvPicPr>    <p:nvPr></p:nvPr>  </p:nvPicPr><p:blipFill><a:blip r:embed="rId8"></a:blip>  <a:stretch><a:fillRect/></a:stretch></p:blipFill><p:spPr> <a:xfrm>  <a:off x="5669280" y="3154680"/>  <a:ext cx="347472" cy="347472"/> </a:xfrm> <a:prstGeom prst="rect"><a:avLst/></a:prstGeom></p:spPr></p:pic><p:sp><p:nvSpPr><p:cNvPr id="41" name="Text 31"></p:cNvPr><p:cNvSpPr/><p:nvPr></p:nvPr></p:nvSpPr><p:spPr><a:xfrm><a:off x="6080760" y="3108960"/><a:ext cx="2651760" cy="274320"/></a:xfrm><a:prstGeom prst="rect"><a:avLst></a:avLst></a:prstGeom><a:noFill/><a:ln></a:ln></p:spPr><p:txBody><a:bodyPr wrap="square" lIns="0" tIns="0" rIns="0" bIns="0" rtlCol="0" anchor="ctr"></a:bodyPr><a:lstStyle/><a:p><a:pPr indent="0" marL="0"><a:buNone/></a:pPr><a:r><a:rPr lang="en-US" sz="1300" b="1" dirty="0"><a:solidFill><a:srgbClr val="01579B"/></a:solidFill></a:rPr><a:t>Azure OpenAI</a:t></a:r><a:endParaRPr lang="en-US" sz="1300" dirty="0"/></a:p></p:txBody></p:sp><p:sp><p:nvSpPr><p:cNvPr id="42" name="Text 32"></p:cNvPr><p:cNvSpPr/><p:nvPr></p:nvPr></p:nvSpPr><p:spPr><a:xfrm><a:off x="6080760" y="3401568"/><a:ext cx="2651760" cy="320040"/></a:xfrm><a:prstGeom prst="rect"><a:avLst></a:avLst></a:prstGeom><a:noFill/><a:ln></a:ln></p:spPr><p:txBody><a:bodyPr wrap="square" lIns="0" tIns="0" rIns="0" bIns="0" rtlCol="0" anchor="ctr"></a:bodyPr><a:lstStyle/><a:p><a:pPr indent="0" marL="0"><a:buNone/></a:pPr><a:r><a:rPr lang="en-US" sz="1100" dirty="0"><a:solidFill><a:srgbClr val="6B7280"/></a:solidFill></a:rPr><a:t>GPT-4o Vision déployé en instance dédiée</a:t></a:r><a:endParaRPr lang="en-US" sz="1100" dirty="0"/></a:p></p:txBody></p:sp><p:pic>  <p:nvPicPr><p:cNvPr id="43" name="Image 8" descr="preencoded.png">    </p:cNvPr>    <p:cNvPicPr><a:picLocks noChangeAspect="1"/></p:cNvPicPr>    <p:nvPr></p:nvPr>  </p:nvPicPr><p:blipFill><a:blip r:embed="rId9"></a:blip>  <a:stretch><a:fillRect/></a:stretch></p:blipFill><p:spPr> <a:xfrm>  <a:off x="5669280" y="3977640"/>  <a:ext cx="347472" cy="347472"/> </a:xfrm> <a:prstGeom prst="rect"><a:avLst/></a:prstGeom></p:spPr></p:pic><p:sp><p:nvSpPr><p:cNvPr id="44" name="Text 33"></p:cNvPr><p:cNvSpPr/><p:nvPr></p:nvPr></p:nvSpPr><p:spPr><a:xfrm><a:off x="6080760" y="3931920"/><a:ext cx="2651760" cy="274320"/></a:xfrm><a:prstGeom prst="rect"><a:avLst></a:avLst></a:prstGeom><a:noFill/><a:ln></a:ln></p:spPr><p:txBody><a:bodyPr wrap="square" lIns="0" tIns="0" rIns="0" bIns="0" rtlCol="0" anchor="ctr"></a:bodyPr><a:lstStyle/><a:p><a:pPr indent="0" marL="0"><a:buNone/></a:pPr><a:r><a:rPr lang="en-US" sz="1300" b="1" dirty="0"><a:solidFill><a:srgbClr val="01579B"/></a:solidFill></a:rPr><a:t>Azure VPN / SSL</a:t></a:r><a:endParaRPr lang="en-US" sz="1300" dirty="0"/></a:p></p:txBody></p:sp><p:sp><p:nvSpPr><p:cNvPr id="45" name="Text 34"></p:cNvPr><p:cNvSpPr/><p:nvPr></p:nvPr></p:nvSpPr><p:spPr><a:xfrm><a:off x="6080760" y="4224528"/><a:ext cx="2651760" cy="320040"/></a:xfrm><a:prstGeom prst="rect"><a:avLst></a:avLst></a:prstGeom><a:noFill/><a:ln></a:ln></p:spPr><p:txBody><a:bodyPr wrap="square" lIns="0" tIns="0" rIns="0" bIns="0" rtlCol="0" anchor="ctr"></a:bodyPr><a:lstStyle/><a:p><a:pPr indent="0" marL="0"><a:buNone/></a:pPr><a:r><a:rPr lang="en-US" sz="1100" dirty="0"><a:solidFill><a:srgbClr val="6B7280"/></a:solidFill></a:rPr><a:t>Accès sécurisé + certificats TLS</a:t></a:r><a:endParaRPr lang="en-US" sz="1100" dirty="0"/></a:p></p:txBody></p:sp></p:spTree></p:cSld><p:clrMapOvr><a:masterClrMapping/></p:clrMapOvr></p:sld>
 </file>
 
 <file path=ppt/slides/slide8.xml><?xml version="1.0" encoding="utf-8"?>
@@ -9903,7 +8468,7 @@
                   <a:srgbClr val="6B7280"/>
                 </a:solidFill>
               </a:rPr>
-              <a:t>Lead Dev Backend + Architecture cloud</a:t>
+              <a:t>Tech Lead Full-Stack + Intégration IA</a:t>
             </a:r>
             <a:endParaRPr lang="en-US" sz="1100" dirty="0"/>
           </a:p>
@@ -9995,7 +8560,7 @@
                   <a:srgbClr val="6B7280"/>
                 </a:solidFill>
               </a:rPr>
-              <a:t>Développeur Mobile (React Native)</a:t>
+              <a:t>Backend Node.js + Déploiement Azure</a:t>
             </a:r>
             <a:endParaRPr lang="en-US" sz="1100" dirty="0"/>
           </a:p>
@@ -10087,7 +8652,7 @@
                   <a:srgbClr val="6B7280"/>
                 </a:solidFill>
               </a:rPr>
-              <a:t>Intégration IA + Base de données</a:t>
+              <a:t>Slides + Données seed + Documentation</a:t>
             </a:r>
             <a:endParaRPr lang="en-US" sz="1100" dirty="0"/>
           </a:p>
@@ -10179,7 +8744,7 @@
                   <a:srgbClr val="6B7280"/>
                 </a:solidFill>
               </a:rPr>
-              <a:t>DevOps / Docker + Documentation</a:t>
+              <a:t>Schémas archi + User stories</a:t>
             </a:r>
             <a:endParaRPr lang="en-US" sz="1100" dirty="0"/>
           </a:p>
@@ -10646,7 +9211,7 @@
                   <a:srgbClr val="6B7280"/>
                 </a:solidFill>
               </a:rPr>
-              <a:t>46 commits, branches feature</a:t>
+              <a:t>84 commits, branches feature</a:t>
             </a:r>
             <a:endParaRPr lang="en-US" sz="1100" dirty="0"/>
           </a:p>
@@ -10805,7 +9370,7 @@
                   <a:srgbClr val="A7D9B8"/>
                 </a:solidFill>
               </a:rPr>
-              <a:t>46 commits · 1 fork · JS 99.6% · Dockerfile</a:t>
+              <a:t>84 commits · JS 99.6% · Dockerfile</a:t>
             </a:r>
             <a:endParaRPr lang="en-US" sz="1100" dirty="0"/>
           </a:p>
@@ -11152,7 +9717,7 @@
                   <a:srgbClr val="374151"/>
                 </a:solidFill>
               </a:rPr>
-              <a:t>Authentification JWT complète (login + register)</a:t>
+              <a:t>Authentification JWT (connexion sécurisée)</a:t>
             </a:r>
             <a:endParaRPr lang="en-US" sz="1100" dirty="0"/>
           </a:p>
